--- a/Week4/fMRIPrep.pptx
+++ b/Week4/fMRIPrep.pptx
@@ -5,7 +5,7 @@
     <p:sldMasterId id="2147483648" r:id="rId1"/>
   </p:sldMasterIdLst>
   <p:sldIdLst>
-    <p:sldId id="257" r:id="rId2"/>
+    <p:sldId id="287" r:id="rId2"/>
   </p:sldIdLst>
   <p:sldSz cx="12192000" cy="6858000"/>
   <p:notesSz cx="6858000" cy="9144000"/>
@@ -104,6 +104,11 @@
       </a:defRPr>
     </a:lvl9pPr>
   </p:defaultTextStyle>
+  <p:extLst>
+    <p:ext uri="{EFAFB233-063F-42B5-8137-9DF3F51BA10A}">
+      <p15:sldGuideLst xmlns:p15="http://schemas.microsoft.com/office/powerpoint/2012/main"/>
+    </p:ext>
+  </p:extLst>
 </p:presentation>
 </file>
 
@@ -913,8 +918,13 @@
             </a:r>
             <a:r>
               <a:rPr lang="en-US" dirty="0"/>
-              <a:t> Pipeline</a:t>
-            </a:r>
+              <a:t> Pipeline – copy and paste in </a:t>
+            </a:r>
+            <a:r>
+              <a:rPr lang="en-US" dirty="0" err="1"/>
+              <a:t>rivanna</a:t>
+            </a:r>
+            <a:endParaRPr lang="en-US" dirty="0"/>
           </a:p>
         </p:txBody>
       </p:sp>
@@ -933,7 +943,7 @@
         <p:spPr>
           <a:xfrm>
             <a:off x="838200" y="1415587"/>
-            <a:ext cx="10790432" cy="5262979"/>
+            <a:ext cx="10790432" cy="4801314"/>
           </a:xfrm>
           <a:prstGeom prst="rect">
             <a:avLst/>
@@ -949,17 +959,17 @@
           <a:lstStyle/>
           <a:p>
             <a:r>
-              <a:rPr lang="en-US" sz="1600" b="1" dirty="0">
-                <a:solidFill>
-                  <a:schemeClr val="bg1"/>
-                </a:solidFill>
-              </a:rPr>
-              <a:t>&gt;&gt; </a:t>
-            </a:r>
-            <a:r>
-              <a:rPr lang="en-US" sz="1600" b="1" dirty="0">
-                <a:solidFill>
-                  <a:schemeClr val="accent4">
+              <a:rPr lang="en-US" b="1" dirty="0">
+                <a:solidFill>
+                  <a:schemeClr val="bg1"/>
+                </a:solidFill>
+              </a:rPr>
+              <a:t>export </a:t>
+            </a:r>
+            <a:r>
+              <a:rPr lang="en-US" b="1" dirty="0">
+                <a:solidFill>
+                  <a:schemeClr val="accent1">
                     <a:lumMod val="40000"/>
                     <a:lumOff val="60000"/>
                   </a:schemeClr>
@@ -968,57 +978,47 @@
               <a:t>NETID</a:t>
             </a:r>
             <a:r>
-              <a:rPr lang="en-US" sz="1600" b="1" dirty="0">
-                <a:solidFill>
-                  <a:schemeClr val="bg1"/>
-                </a:solidFill>
-              </a:rPr>
-              <a:t>=“</a:t>
-            </a:r>
-            <a:r>
-              <a:rPr lang="en-US" sz="1600" b="1" dirty="0">
-                <a:solidFill>
-                  <a:srgbClr val="C00000"/>
-                </a:solidFill>
-              </a:rPr>
-              <a:t>YOUR NET ID</a:t>
-            </a:r>
-            <a:r>
-              <a:rPr lang="en-US" sz="1600" b="1" dirty="0">
-                <a:solidFill>
-                  <a:schemeClr val="bg1"/>
-                </a:solidFill>
-              </a:rPr>
-              <a:t>”</a:t>
-            </a:r>
-          </a:p>
-          <a:p>
-            <a:r>
-              <a:rPr lang="en-US" sz="1600" b="1" dirty="0">
-                <a:solidFill>
-                  <a:schemeClr val="bg1"/>
-                </a:solidFill>
-              </a:rPr>
-              <a:t>&gt;&gt; </a:t>
-            </a:r>
-            <a:r>
-              <a:rPr lang="en-US" sz="1600" b="1" dirty="0">
-                <a:solidFill>
-                  <a:srgbClr val="FFC000"/>
+              <a:rPr lang="en-US" b="1" dirty="0">
+                <a:solidFill>
+                  <a:schemeClr val="bg1"/>
+                </a:solidFill>
+              </a:rPr>
+              <a:t>=$(</a:t>
+            </a:r>
+            <a:r>
+              <a:rPr lang="en-US" b="1" dirty="0" err="1">
+                <a:solidFill>
+                  <a:schemeClr val="bg1"/>
+                </a:solidFill>
+              </a:rPr>
+              <a:t>whoami</a:t>
+            </a:r>
+            <a:r>
+              <a:rPr lang="en-US" b="1" dirty="0">
+                <a:solidFill>
+                  <a:schemeClr val="bg1"/>
+                </a:solidFill>
+              </a:rPr>
+              <a:t>) ; export </a:t>
+            </a:r>
+            <a:r>
+              <a:rPr lang="en-US" b="1" dirty="0">
+                <a:solidFill>
+                  <a:schemeClr val="accent2"/>
                 </a:solidFill>
               </a:rPr>
               <a:t>SUBID</a:t>
             </a:r>
             <a:r>
-              <a:rPr lang="en-US" sz="1600" b="1" dirty="0">
-                <a:solidFill>
-                  <a:schemeClr val="bg1"/>
-                </a:solidFill>
-              </a:rPr>
-              <a:t>=“</a:t>
-            </a:r>
-            <a:r>
-              <a:rPr lang="en-US" sz="1600" b="1" dirty="0" err="1">
+              <a:rPr lang="en-US" b="1" dirty="0">
+                <a:solidFill>
+                  <a:schemeClr val="bg1"/>
+                </a:solidFill>
+              </a:rPr>
+              <a:t>="</a:t>
+            </a:r>
+            <a:r>
+              <a:rPr lang="en-US" b="1" dirty="0" err="1">
                 <a:solidFill>
                   <a:schemeClr val="bg1"/>
                 </a:solidFill>
@@ -1026,167 +1026,16 @@
               <a:t>rcg</a:t>
             </a:r>
             <a:r>
-              <a:rPr lang="en-US" sz="1600" b="1" dirty="0">
-                <a:solidFill>
-                  <a:schemeClr val="bg1"/>
-                </a:solidFill>
-              </a:rPr>
-              <a:t>”</a:t>
-            </a:r>
-          </a:p>
-          <a:p>
-            <a:r>
-              <a:rPr lang="en-US" sz="1600" b="1" dirty="0">
-                <a:solidFill>
-                  <a:schemeClr val="bg1"/>
-                </a:solidFill>
-              </a:rPr>
-              <a:t>&gt;&gt;</a:t>
-            </a:r>
-          </a:p>
-          <a:p>
-            <a:r>
-              <a:rPr lang="en-US" sz="1600" b="1" dirty="0">
-                <a:solidFill>
-                  <a:schemeClr val="bg1"/>
-                </a:solidFill>
-              </a:rPr>
-              <a:t>&gt;&gt; </a:t>
-            </a:r>
-            <a:r>
-              <a:rPr lang="en-US" sz="1600" b="1" dirty="0" err="1">
-                <a:solidFill>
-                  <a:schemeClr val="bg1"/>
-                </a:solidFill>
-              </a:rPr>
-              <a:t>mkdir</a:t>
-            </a:r>
-            <a:r>
-              <a:rPr lang="en-US" sz="1600" b="1" dirty="0">
-                <a:solidFill>
-                  <a:schemeClr val="bg1"/>
-                </a:solidFill>
-              </a:rPr>
-              <a:t> /scratch/${</a:t>
-            </a:r>
-            <a:r>
-              <a:rPr lang="en-US" sz="1600" b="1" dirty="0">
-                <a:solidFill>
-                  <a:schemeClr val="accent4">
-                    <a:lumMod val="40000"/>
-                    <a:lumOff val="60000"/>
-                  </a:schemeClr>
-                </a:solidFill>
-              </a:rPr>
-              <a:t>NETID</a:t>
-            </a:r>
-            <a:r>
-              <a:rPr lang="en-US" sz="1600" b="1" dirty="0">
-                <a:solidFill>
-                  <a:schemeClr val="bg1"/>
-                </a:solidFill>
-              </a:rPr>
-              <a:t>}/Brainhack</a:t>
-            </a:r>
-          </a:p>
-          <a:p>
-            <a:r>
-              <a:rPr lang="en-US" sz="1600" b="1" dirty="0">
-                <a:solidFill>
-                  <a:schemeClr val="bg1"/>
-                </a:solidFill>
-              </a:rPr>
-              <a:t>&gt;&gt; cd /scratch/${</a:t>
-            </a:r>
-            <a:r>
-              <a:rPr lang="en-US" sz="1600" b="1" dirty="0">
-                <a:solidFill>
-                  <a:schemeClr val="accent4">
-                    <a:lumMod val="40000"/>
-                    <a:lumOff val="60000"/>
-                  </a:schemeClr>
-                </a:solidFill>
-              </a:rPr>
-              <a:t>NETID</a:t>
-            </a:r>
-            <a:r>
-              <a:rPr lang="en-US" sz="1600" b="1" dirty="0">
-                <a:solidFill>
-                  <a:schemeClr val="bg1"/>
-                </a:solidFill>
-              </a:rPr>
-              <a:t>}/Brainhack</a:t>
-            </a:r>
-          </a:p>
-          <a:p>
-            <a:r>
-              <a:rPr lang="en-US" sz="1600" b="1" dirty="0">
-                <a:solidFill>
-                  <a:schemeClr val="bg1"/>
-                </a:solidFill>
-              </a:rPr>
-              <a:t>&gt;&gt; cp -r /project/</a:t>
-            </a:r>
-            <a:r>
-              <a:rPr lang="en-US" sz="1600" b="1" dirty="0" err="1">
-                <a:solidFill>
-                  <a:schemeClr val="bg1"/>
-                </a:solidFill>
-              </a:rPr>
-              <a:t>morrislab</a:t>
-            </a:r>
-            <a:r>
-              <a:rPr lang="en-US" sz="1600" b="1" dirty="0">
-                <a:solidFill>
-                  <a:schemeClr val="bg1"/>
-                </a:solidFill>
-              </a:rPr>
-              <a:t>/Craig/</a:t>
-            </a:r>
-            <a:r>
-              <a:rPr lang="en-US" sz="1600" b="1" dirty="0" err="1">
-                <a:solidFill>
-                  <a:schemeClr val="bg1"/>
-                </a:solidFill>
-              </a:rPr>
-              <a:t>rcgBIDS</a:t>
-            </a:r>
-            <a:r>
-              <a:rPr lang="en-US" sz="1600" b="1" dirty="0">
-                <a:solidFill>
-                  <a:schemeClr val="bg1"/>
-                </a:solidFill>
-              </a:rPr>
-              <a:t> /scratch/${</a:t>
-            </a:r>
-            <a:r>
-              <a:rPr lang="en-US" sz="1600" b="1" dirty="0">
-                <a:solidFill>
-                  <a:schemeClr val="accent4">
-                    <a:lumMod val="40000"/>
-                    <a:lumOff val="60000"/>
-                  </a:schemeClr>
-                </a:solidFill>
-              </a:rPr>
-              <a:t>NETID</a:t>
-            </a:r>
-            <a:r>
-              <a:rPr lang="en-US" sz="1600" b="1" dirty="0">
-                <a:solidFill>
-                  <a:schemeClr val="bg1"/>
-                </a:solidFill>
-              </a:rPr>
-              <a:t>}/</a:t>
-            </a:r>
-            <a:r>
-              <a:rPr lang="en-US" sz="1600" b="1" dirty="0" err="1">
-                <a:solidFill>
-                  <a:schemeClr val="bg1"/>
-                </a:solidFill>
-              </a:rPr>
-              <a:t>brainhack</a:t>
-            </a:r>
-            <a:endParaRPr lang="en-US" sz="1600" b="1" dirty="0">
+              <a:rPr lang="en-US" b="1" dirty="0">
+                <a:solidFill>
+                  <a:schemeClr val="bg1"/>
+                </a:solidFill>
+              </a:rPr>
+              <a:t>"</a:t>
+            </a:r>
+          </a:p>
+          <a:p>
+            <a:endParaRPr lang="en-US" b="1" dirty="0">
               <a:solidFill>
                 <a:schemeClr val="bg1"/>
               </a:solidFill>
@@ -1194,48 +1043,102 @@
           </a:p>
           <a:p>
             <a:r>
-              <a:rPr lang="en-US" sz="1600" b="1" dirty="0">
-                <a:solidFill>
-                  <a:schemeClr val="bg1"/>
-                </a:solidFill>
-              </a:rPr>
-              <a:t>&gt;&gt; </a:t>
-            </a:r>
-          </a:p>
-          <a:p>
-            <a:r>
-              <a:rPr lang="en-US" sz="1600" b="1" dirty="0">
-                <a:solidFill>
-                  <a:schemeClr val="bg1"/>
-                </a:solidFill>
-              </a:rPr>
-              <a:t>&gt;&gt; module load </a:t>
-            </a:r>
-            <a:r>
-              <a:rPr lang="en-US" sz="1600" b="1" dirty="0" err="1">
-                <a:solidFill>
-                  <a:schemeClr val="bg1"/>
-                </a:solidFill>
-              </a:rPr>
-              <a:t>apptainer</a:t>
-            </a:r>
-            <a:r>
-              <a:rPr lang="en-US" sz="1600" b="1" dirty="0">
-                <a:solidFill>
-                  <a:schemeClr val="bg1"/>
-                </a:solidFill>
-              </a:rPr>
-              <a:t> </a:t>
-            </a:r>
-            <a:r>
-              <a:rPr lang="en-US" sz="1600" b="1" dirty="0" err="1">
-                <a:solidFill>
-                  <a:schemeClr val="bg1"/>
-                </a:solidFill>
-              </a:rPr>
-              <a:t>fmriprep</a:t>
-            </a:r>
-            <a:endParaRPr lang="en-US" sz="1600" b="1" dirty="0">
+              <a:rPr lang="en-US" b="1" dirty="0">
+                <a:solidFill>
+                  <a:schemeClr val="bg1"/>
+                </a:solidFill>
+              </a:rPr>
+              <a:t>if [[ ! –d /scratch/${</a:t>
+            </a:r>
+            <a:r>
+              <a:rPr lang="en-US" b="1" dirty="0">
+                <a:solidFill>
+                  <a:schemeClr val="accent1">
+                    <a:lumMod val="40000"/>
+                    <a:lumOff val="60000"/>
+                  </a:schemeClr>
+                </a:solidFill>
+              </a:rPr>
+              <a:t>NETID</a:t>
+            </a:r>
+            <a:r>
+              <a:rPr lang="en-US" b="1" dirty="0">
+                <a:solidFill>
+                  <a:schemeClr val="bg1"/>
+                </a:solidFill>
+              </a:rPr>
+              <a:t>}/</a:t>
+            </a:r>
+            <a:r>
+              <a:rPr lang="en-US" b="1" dirty="0" err="1">
+                <a:solidFill>
+                  <a:schemeClr val="bg1"/>
+                </a:solidFill>
+              </a:rPr>
+              <a:t>brainhack</a:t>
+            </a:r>
+            <a:r>
+              <a:rPr lang="en-US" b="1" dirty="0">
+                <a:solidFill>
+                  <a:schemeClr val="bg1"/>
+                </a:solidFill>
+              </a:rPr>
+              <a:t> ]] ; then</a:t>
+            </a:r>
+          </a:p>
+          <a:p>
+            <a:r>
+              <a:rPr lang="en-US" b="1" dirty="0">
+                <a:solidFill>
+                  <a:schemeClr val="bg1"/>
+                </a:solidFill>
+              </a:rPr>
+              <a:t>	</a:t>
+            </a:r>
+            <a:r>
+              <a:rPr lang="en-US" b="1" dirty="0" err="1">
+                <a:solidFill>
+                  <a:schemeClr val="bg1"/>
+                </a:solidFill>
+              </a:rPr>
+              <a:t>mkdir</a:t>
+            </a:r>
+            <a:r>
+              <a:rPr lang="en-US" b="1" dirty="0">
+                <a:solidFill>
+                  <a:schemeClr val="bg1"/>
+                </a:solidFill>
+              </a:rPr>
+              <a:t> /scratch/${</a:t>
+            </a:r>
+            <a:r>
+              <a:rPr lang="en-US" b="1" dirty="0">
+                <a:solidFill>
+                  <a:schemeClr val="accent1">
+                    <a:lumMod val="40000"/>
+                    <a:lumOff val="60000"/>
+                  </a:schemeClr>
+                </a:solidFill>
+              </a:rPr>
+              <a:t>NETID</a:t>
+            </a:r>
+            <a:r>
+              <a:rPr lang="en-US" b="1" dirty="0">
+                <a:solidFill>
+                  <a:schemeClr val="bg1"/>
+                </a:solidFill>
+              </a:rPr>
+              <a:t>}/</a:t>
+            </a:r>
+            <a:r>
+              <a:rPr lang="en-US" b="1" dirty="0" err="1">
+                <a:solidFill>
+                  <a:schemeClr val="bg1"/>
+                </a:solidFill>
+              </a:rPr>
+              <a:t>brainhack</a:t>
+            </a:r>
+            <a:endParaRPr lang="en-US" b="1" dirty="0">
               <a:solidFill>
                 <a:schemeClr val="bg1"/>
               </a:solidFill>
@@ -1243,93 +1146,27 @@
           </a:p>
           <a:p>
             <a:r>
-              <a:rPr lang="en-US" sz="1600" b="1" dirty="0">
-                <a:solidFill>
-                  <a:schemeClr val="bg1"/>
-                </a:solidFill>
-              </a:rPr>
-              <a:t>&gt;&gt;</a:t>
-            </a:r>
-          </a:p>
-          <a:p>
-            <a:r>
-              <a:rPr lang="en-US" sz="1600" b="1" dirty="0">
-                <a:solidFill>
-                  <a:schemeClr val="bg1"/>
-                </a:solidFill>
-              </a:rPr>
-              <a:t>&gt;&gt; </a:t>
-            </a:r>
-            <a:r>
-              <a:rPr lang="en-US" sz="1600" b="1" dirty="0" err="1">
-                <a:solidFill>
-                  <a:schemeClr val="bg1"/>
-                </a:solidFill>
-              </a:rPr>
-              <a:t>apptainer</a:t>
-            </a:r>
-            <a:r>
-              <a:rPr lang="en-US" sz="1600" b="1" dirty="0">
-                <a:solidFill>
-                  <a:schemeClr val="bg1"/>
-                </a:solidFill>
-              </a:rPr>
-              <a:t> run --cleanenv </a:t>
-            </a:r>
-            <a:r>
-              <a:rPr lang="fr-FR" sz="1600" b="1" dirty="0">
-                <a:solidFill>
-                  <a:schemeClr val="bg1"/>
-                </a:solidFill>
-              </a:rPr>
-              <a:t>/</a:t>
-            </a:r>
-            <a:r>
-              <a:rPr lang="fr-FR" sz="1600" b="1" dirty="0" err="1">
-                <a:solidFill>
-                  <a:schemeClr val="bg1"/>
-                </a:solidFill>
-              </a:rPr>
-              <a:t>sfs</a:t>
-            </a:r>
-            <a:r>
-              <a:rPr lang="fr-FR" sz="1600" b="1" dirty="0">
-                <a:solidFill>
-                  <a:schemeClr val="bg1"/>
-                </a:solidFill>
-              </a:rPr>
-              <a:t>/applications/resources/containers/</a:t>
-            </a:r>
-            <a:r>
-              <a:rPr lang="fr-FR" sz="1600" b="1" dirty="0" err="1">
-                <a:solidFill>
-                  <a:schemeClr val="bg1"/>
-                </a:solidFill>
-              </a:rPr>
-              <a:t>apptainer</a:t>
-            </a:r>
-            <a:r>
-              <a:rPr lang="en-US" sz="1600" b="1" dirty="0">
-                <a:solidFill>
-                  <a:schemeClr val="bg1"/>
-                </a:solidFill>
-              </a:rPr>
-              <a:t>/fmriprep-23.1.4.sif \</a:t>
-            </a:r>
-          </a:p>
-          <a:p>
-            <a:r>
-              <a:rPr lang="en-US" sz="1600" b="1" dirty="0">
-                <a:solidFill>
-                  <a:schemeClr val="bg1"/>
-                </a:solidFill>
-              </a:rPr>
-              <a:t>&gt;&gt;        /scratch/${</a:t>
-            </a:r>
-            <a:r>
-              <a:rPr lang="en-US" sz="1600" b="1" dirty="0">
-                <a:solidFill>
-                  <a:schemeClr val="accent4">
+              <a:rPr lang="en-US" b="1" dirty="0">
+                <a:solidFill>
+                  <a:schemeClr val="bg1"/>
+                </a:solidFill>
+              </a:rPr>
+              <a:t>fi</a:t>
+            </a:r>
+          </a:p>
+          <a:p>
+            <a:r>
+              <a:rPr lang="en-US" b="1" dirty="0">
+                <a:solidFill>
+                  <a:schemeClr val="bg1"/>
+                </a:solidFill>
+              </a:rPr>
+              <a:t>cd /scratch/${</a:t>
+            </a:r>
+            <a:r>
+              <a:rPr lang="en-US" b="1" dirty="0">
+                <a:solidFill>
+                  <a:schemeClr val="accent1">
                     <a:lumMod val="40000"/>
                     <a:lumOff val="60000"/>
                   </a:schemeClr>
@@ -1338,7 +1175,7 @@
               <a:t>NETID</a:t>
             </a:r>
             <a:r>
-              <a:rPr lang="en-US" sz="1600" b="1" dirty="0">
+              <a:rPr lang="en-US" b="1" dirty="0">
                 <a:solidFill>
                   <a:schemeClr val="bg1"/>
                 </a:solidFill>
@@ -1346,23 +1183,46 @@
               <a:t>}/</a:t>
             </a:r>
             <a:r>
-              <a:rPr lang="en-US" sz="1600" b="1" dirty="0" err="1">
+              <a:rPr lang="en-US" b="1" dirty="0" err="1">
                 <a:solidFill>
                   <a:schemeClr val="bg1"/>
                 </a:solidFill>
               </a:rPr>
               <a:t>brainhack</a:t>
             </a:r>
-            <a:r>
-              <a:rPr lang="en-US" sz="1600" b="1" dirty="0">
-                <a:solidFill>
-                  <a:schemeClr val="bg1"/>
-                </a:solidFill>
-              </a:rPr>
-              <a:t>/</a:t>
-            </a:r>
-            <a:r>
-              <a:rPr lang="en-US" sz="1600" b="1" dirty="0" err="1">
+            <a:endParaRPr lang="en-US" b="1" dirty="0">
+              <a:solidFill>
+                <a:schemeClr val="bg1"/>
+              </a:solidFill>
+            </a:endParaRPr>
+          </a:p>
+          <a:p>
+            <a:r>
+              <a:rPr lang="en-US" b="1" dirty="0">
+                <a:solidFill>
+                  <a:schemeClr val="bg1"/>
+                </a:solidFill>
+              </a:rPr>
+              <a:t>cp -r /project/</a:t>
+            </a:r>
+            <a:r>
+              <a:rPr lang="en-US" b="1" dirty="0" err="1">
+                <a:solidFill>
+                  <a:schemeClr val="bg1"/>
+                </a:solidFill>
+              </a:rPr>
+              <a:t>morrislab</a:t>
+            </a:r>
+            <a:r>
+              <a:rPr lang="en-US" b="1" dirty="0">
+                <a:solidFill>
+                  <a:schemeClr val="bg1"/>
+                </a:solidFill>
+              </a:rPr>
+              <a:t>/Craig/</a:t>
+            </a:r>
+            <a:r>
+              <a:rPr lang="en-US" b="1" dirty="0" err="1">
                 <a:solidFill>
                   <a:schemeClr val="bg1"/>
                 </a:solidFill>
@@ -1370,608 +1230,488 @@
               <a:t>rcgBIDS</a:t>
             </a:r>
             <a:r>
-              <a:rPr lang="en-US" sz="1600" b="1" dirty="0">
-                <a:solidFill>
-                  <a:schemeClr val="bg1"/>
-                </a:solidFill>
-              </a:rPr>
-              <a:t> \ </a:t>
-            </a:r>
-            <a:r>
-              <a:rPr lang="en-US" sz="1600" b="1" dirty="0">
-                <a:solidFill>
-                  <a:schemeClr val="accent5">
+              <a:rPr lang="en-US" b="1" dirty="0">
+                <a:solidFill>
+                  <a:schemeClr val="bg1"/>
+                </a:solidFill>
+              </a:rPr>
+              <a:t> /scratch/${</a:t>
+            </a:r>
+            <a:r>
+              <a:rPr lang="en-US" b="1" dirty="0">
+                <a:solidFill>
+                  <a:schemeClr val="accent1">
                     <a:lumMod val="40000"/>
                     <a:lumOff val="60000"/>
                   </a:schemeClr>
                 </a:solidFill>
-                <a:sym typeface="Wingdings" panose="05000000000000000000" pitchFamily="2" charset="2"/>
-              </a:rPr>
-              <a:t># BIDS </a:t>
-            </a:r>
-            <a:r>
-              <a:rPr lang="en-US" sz="1600" b="1" dirty="0" err="1">
-                <a:solidFill>
-                  <a:schemeClr val="accent5">
+              </a:rPr>
+              <a:t>NETID</a:t>
+            </a:r>
+            <a:r>
+              <a:rPr lang="en-US" b="1" dirty="0">
+                <a:solidFill>
+                  <a:schemeClr val="bg1"/>
+                </a:solidFill>
+              </a:rPr>
+              <a:t>}/</a:t>
+            </a:r>
+            <a:r>
+              <a:rPr lang="en-US" b="1" dirty="0" err="1">
+                <a:solidFill>
+                  <a:schemeClr val="bg1"/>
+                </a:solidFill>
+              </a:rPr>
+              <a:t>brainhack</a:t>
+            </a:r>
+            <a:endParaRPr lang="en-US" b="1" dirty="0">
+              <a:solidFill>
+                <a:schemeClr val="bg1"/>
+              </a:solidFill>
+            </a:endParaRPr>
+          </a:p>
+          <a:p>
+            <a:endParaRPr lang="en-US" b="1" dirty="0">
+              <a:solidFill>
+                <a:schemeClr val="bg1"/>
+              </a:solidFill>
+            </a:endParaRPr>
+          </a:p>
+          <a:p>
+            <a:r>
+              <a:rPr lang="en-US" b="1" dirty="0">
+                <a:solidFill>
+                  <a:schemeClr val="bg1"/>
+                </a:solidFill>
+              </a:rPr>
+              <a:t>module load </a:t>
+            </a:r>
+            <a:r>
+              <a:rPr lang="en-US" b="1" dirty="0" err="1">
+                <a:solidFill>
+                  <a:schemeClr val="bg1"/>
+                </a:solidFill>
+              </a:rPr>
+              <a:t>apptainer</a:t>
+            </a:r>
+            <a:r>
+              <a:rPr lang="en-US" b="1" dirty="0">
+                <a:solidFill>
+                  <a:schemeClr val="bg1"/>
+                </a:solidFill>
+              </a:rPr>
+              <a:t> </a:t>
+            </a:r>
+            <a:r>
+              <a:rPr lang="en-US" b="1" dirty="0" err="1">
+                <a:solidFill>
+                  <a:schemeClr val="bg1"/>
+                </a:solidFill>
+              </a:rPr>
+              <a:t>fmriprep</a:t>
+            </a:r>
+            <a:endParaRPr lang="en-US" b="1" dirty="0">
+              <a:solidFill>
+                <a:schemeClr val="bg1"/>
+              </a:solidFill>
+            </a:endParaRPr>
+          </a:p>
+          <a:p>
+            <a:endParaRPr lang="en-US" b="1" dirty="0">
+              <a:solidFill>
+                <a:schemeClr val="bg1"/>
+              </a:solidFill>
+            </a:endParaRPr>
+          </a:p>
+          <a:p>
+            <a:r>
+              <a:rPr lang="en-US" b="1" dirty="0" err="1">
+                <a:solidFill>
+                  <a:schemeClr val="bg1"/>
+                </a:solidFill>
+              </a:rPr>
+              <a:t>apptainer</a:t>
+            </a:r>
+            <a:r>
+              <a:rPr lang="en-US" b="1" dirty="0">
+                <a:solidFill>
+                  <a:schemeClr val="bg1"/>
+                </a:solidFill>
+              </a:rPr>
+              <a:t> run --</a:t>
+            </a:r>
+            <a:r>
+              <a:rPr lang="en-US" b="1" dirty="0" err="1">
+                <a:solidFill>
+                  <a:schemeClr val="bg1"/>
+                </a:solidFill>
+              </a:rPr>
+              <a:t>cleanenv</a:t>
+            </a:r>
+            <a:r>
+              <a:rPr lang="en-US" b="1" dirty="0">
+                <a:solidFill>
+                  <a:schemeClr val="bg1"/>
+                </a:solidFill>
+              </a:rPr>
+              <a:t> --bind /scratch/${</a:t>
+            </a:r>
+            <a:r>
+              <a:rPr lang="en-US" b="1" dirty="0">
+                <a:solidFill>
+                  <a:schemeClr val="accent1">
                     <a:lumMod val="40000"/>
                     <a:lumOff val="60000"/>
                   </a:schemeClr>
                 </a:solidFill>
-                <a:sym typeface="Wingdings" panose="05000000000000000000" pitchFamily="2" charset="2"/>
-              </a:rPr>
-              <a:t>dir</a:t>
-            </a:r>
-            <a:endParaRPr lang="en-US" sz="1600" b="1" dirty="0">
+              </a:rPr>
+              <a:t>NETID</a:t>
+            </a:r>
+            <a:r>
+              <a:rPr lang="en-US" b="1" dirty="0">
+                <a:solidFill>
+                  <a:schemeClr val="bg1"/>
+                </a:solidFill>
+              </a:rPr>
+              <a:t>}/</a:t>
+            </a:r>
+            <a:r>
+              <a:rPr lang="en-US" b="1" dirty="0" err="1">
+                <a:solidFill>
+                  <a:schemeClr val="bg1"/>
+                </a:solidFill>
+              </a:rPr>
+              <a:t>brainhack</a:t>
+            </a:r>
+            <a:r>
+              <a:rPr lang="en-US" b="1" dirty="0">
+                <a:solidFill>
+                  <a:schemeClr val="bg1"/>
+                </a:solidFill>
+              </a:rPr>
+              <a:t>/</a:t>
+            </a:r>
+            <a:r>
+              <a:rPr lang="en-US" b="1" dirty="0" err="1">
+                <a:solidFill>
+                  <a:schemeClr val="bg1"/>
+                </a:solidFill>
+              </a:rPr>
+              <a:t>rcgBIDS</a:t>
+            </a:r>
+            <a:r>
+              <a:rPr lang="en-US" b="1" dirty="0">
+                <a:solidFill>
+                  <a:schemeClr val="bg1"/>
+                </a:solidFill>
+              </a:rPr>
+              <a:t>/:/</a:t>
+            </a:r>
+            <a:r>
+              <a:rPr lang="en-US" b="1" dirty="0" err="1">
+                <a:solidFill>
+                  <a:schemeClr val="bg1"/>
+                </a:solidFill>
+              </a:rPr>
+              <a:t>data:ro</a:t>
+            </a:r>
+            <a:r>
+              <a:rPr lang="en-US" b="1" dirty="0">
+                <a:solidFill>
+                  <a:schemeClr val="bg1"/>
+                </a:solidFill>
+              </a:rPr>
+              <a:t> --bind /scratch/${</a:t>
+            </a:r>
+            <a:r>
+              <a:rPr lang="en-US" b="1" dirty="0">
+                <a:solidFill>
+                  <a:schemeClr val="accent1">
+                    <a:lumMod val="40000"/>
+                    <a:lumOff val="60000"/>
+                  </a:schemeClr>
+                </a:solidFill>
+              </a:rPr>
+              <a:t>NETID</a:t>
+            </a:r>
+            <a:r>
+              <a:rPr lang="en-US" b="1" dirty="0">
+                <a:solidFill>
+                  <a:schemeClr val="bg1"/>
+                </a:solidFill>
+              </a:rPr>
+              <a:t>}/</a:t>
+            </a:r>
+            <a:r>
+              <a:rPr lang="en-US" b="1" dirty="0" err="1">
+                <a:solidFill>
+                  <a:schemeClr val="bg1"/>
+                </a:solidFill>
+              </a:rPr>
+              <a:t>brainhack</a:t>
+            </a:r>
+            <a:r>
+              <a:rPr lang="en-US" b="1" dirty="0">
+                <a:solidFill>
+                  <a:schemeClr val="bg1"/>
+                </a:solidFill>
+              </a:rPr>
+              <a:t>/</a:t>
+            </a:r>
+            <a:r>
+              <a:rPr lang="en-US" b="1" dirty="0" err="1">
+                <a:solidFill>
+                  <a:schemeClr val="bg1"/>
+                </a:solidFill>
+              </a:rPr>
+              <a:t>rcgBIDS</a:t>
+            </a:r>
+            <a:r>
+              <a:rPr lang="en-US" b="1" dirty="0">
+                <a:solidFill>
+                  <a:schemeClr val="bg1"/>
+                </a:solidFill>
+              </a:rPr>
+              <a:t>/derivatives:/out /</a:t>
+            </a:r>
+            <a:r>
+              <a:rPr lang="en-US" b="1" dirty="0" err="1">
+                <a:solidFill>
+                  <a:schemeClr val="bg1"/>
+                </a:solidFill>
+              </a:rPr>
+              <a:t>sfs</a:t>
+            </a:r>
+            <a:r>
+              <a:rPr lang="en-US" b="1" dirty="0">
+                <a:solidFill>
+                  <a:schemeClr val="bg1"/>
+                </a:solidFill>
+              </a:rPr>
+              <a:t>/</a:t>
+            </a:r>
+            <a:r>
+              <a:rPr lang="en-US" b="1" dirty="0" err="1">
+                <a:solidFill>
+                  <a:schemeClr val="bg1"/>
+                </a:solidFill>
+              </a:rPr>
+              <a:t>weka</a:t>
+            </a:r>
+            <a:r>
+              <a:rPr lang="en-US" b="1" dirty="0">
+                <a:solidFill>
+                  <a:schemeClr val="bg1"/>
+                </a:solidFill>
+              </a:rPr>
+              <a:t>/applications/resources/containers/</a:t>
+            </a:r>
+            <a:r>
+              <a:rPr lang="en-US" b="1" dirty="0" err="1">
+                <a:solidFill>
+                  <a:schemeClr val="bg1"/>
+                </a:solidFill>
+              </a:rPr>
+              <a:t>apptainer</a:t>
+            </a:r>
+            <a:r>
+              <a:rPr lang="en-US" b="1" dirty="0">
+                <a:solidFill>
+                  <a:schemeClr val="bg1"/>
+                </a:solidFill>
+              </a:rPr>
+              <a:t>/fmriprep-23.1.4.sif /data /out participant --participant-label ${</a:t>
+            </a:r>
+            <a:r>
+              <a:rPr lang="en-US" b="1" dirty="0">
+                <a:solidFill>
+                  <a:schemeClr val="accent2"/>
+                </a:solidFill>
+              </a:rPr>
+              <a:t>SUBID</a:t>
+            </a:r>
+            <a:r>
+              <a:rPr lang="en-US" b="1" dirty="0">
+                <a:solidFill>
+                  <a:schemeClr val="bg1"/>
+                </a:solidFill>
+              </a:rPr>
+              <a:t>} --fs-license-file /scratch/${</a:t>
+            </a:r>
+            <a:r>
+              <a:rPr lang="en-US" b="1" dirty="0">
+                <a:solidFill>
+                  <a:schemeClr val="accent1">
+                    <a:lumMod val="40000"/>
+                    <a:lumOff val="60000"/>
+                  </a:schemeClr>
+                </a:solidFill>
+              </a:rPr>
+              <a:t>NETID</a:t>
+            </a:r>
+            <a:r>
+              <a:rPr lang="en-US" b="1" dirty="0">
+                <a:solidFill>
+                  <a:schemeClr val="bg1"/>
+                </a:solidFill>
+              </a:rPr>
+              <a:t>}/</a:t>
+            </a:r>
+            <a:r>
+              <a:rPr lang="en-US" b="1" dirty="0" err="1">
+                <a:solidFill>
+                  <a:schemeClr val="bg1"/>
+                </a:solidFill>
+              </a:rPr>
+              <a:t>brainhack</a:t>
+            </a:r>
+            <a:r>
+              <a:rPr lang="en-US" b="1" dirty="0">
+                <a:solidFill>
+                  <a:schemeClr val="bg1"/>
+                </a:solidFill>
+              </a:rPr>
+              <a:t>/</a:t>
+            </a:r>
+            <a:r>
+              <a:rPr lang="en-US" b="1" dirty="0" err="1">
+                <a:solidFill>
+                  <a:schemeClr val="bg1"/>
+                </a:solidFill>
+              </a:rPr>
+              <a:t>rcgBIDS</a:t>
+            </a:r>
+            <a:r>
+              <a:rPr lang="en-US" b="1" dirty="0">
+                <a:solidFill>
+                  <a:schemeClr val="bg1"/>
+                </a:solidFill>
+              </a:rPr>
+              <a:t>/code/license.txt --output-spaces MNI152NLin2009cAsym:res-native:res-2 T1w </a:t>
+            </a:r>
+            <a:r>
+              <a:rPr lang="en-US" b="1" dirty="0" err="1">
+                <a:solidFill>
+                  <a:schemeClr val="bg1"/>
+                </a:solidFill>
+              </a:rPr>
+              <a:t>func</a:t>
+            </a:r>
+            <a:r>
+              <a:rPr lang="en-US" b="1" dirty="0">
+                <a:solidFill>
+                  <a:schemeClr val="bg1"/>
+                </a:solidFill>
+              </a:rPr>
+              <a:t> -w /scratch/${</a:t>
+            </a:r>
+            <a:r>
+              <a:rPr lang="en-US" b="1" dirty="0">
+                <a:solidFill>
+                  <a:schemeClr val="accent1">
+                    <a:lumMod val="40000"/>
+                    <a:lumOff val="60000"/>
+                  </a:schemeClr>
+                </a:solidFill>
+              </a:rPr>
+              <a:t>NETID</a:t>
+            </a:r>
+            <a:r>
+              <a:rPr lang="en-US" b="1" dirty="0">
+                <a:solidFill>
+                  <a:schemeClr val="bg1"/>
+                </a:solidFill>
+              </a:rPr>
+              <a:t>}/</a:t>
+            </a:r>
+            <a:r>
+              <a:rPr lang="en-US" b="1" dirty="0" err="1">
+                <a:solidFill>
+                  <a:schemeClr val="bg1"/>
+                </a:solidFill>
+              </a:rPr>
+              <a:t>brainhack</a:t>
+            </a:r>
+            <a:r>
+              <a:rPr lang="en-US" b="1" dirty="0">
+                <a:solidFill>
+                  <a:schemeClr val="bg1"/>
+                </a:solidFill>
+              </a:rPr>
+              <a:t>/</a:t>
+            </a:r>
+            <a:r>
+              <a:rPr lang="en-US" b="1" dirty="0" err="1">
+                <a:solidFill>
+                  <a:schemeClr val="bg1"/>
+                </a:solidFill>
+              </a:rPr>
+              <a:t>fmriprep_work</a:t>
+            </a:r>
+            <a:r>
+              <a:rPr lang="en-US" b="1" dirty="0">
+                <a:solidFill>
+                  <a:schemeClr val="bg1"/>
+                </a:solidFill>
+              </a:rPr>
+              <a:t>/${</a:t>
+            </a:r>
+            <a:r>
+              <a:rPr lang="en-US" b="1" dirty="0">
+                <a:solidFill>
+                  <a:schemeClr val="accent2"/>
+                </a:solidFill>
+              </a:rPr>
+              <a:t>SUBID</a:t>
+            </a:r>
+            <a:r>
+              <a:rPr lang="en-US" b="1" dirty="0">
+                <a:solidFill>
+                  <a:schemeClr val="bg1"/>
+                </a:solidFill>
+              </a:rPr>
+              <a:t>} --</a:t>
+            </a:r>
+            <a:r>
+              <a:rPr lang="en-US" b="1" dirty="0" err="1">
+                <a:solidFill>
+                  <a:schemeClr val="bg1"/>
+                </a:solidFill>
+              </a:rPr>
+              <a:t>omp-nthreads</a:t>
+            </a:r>
+            <a:r>
+              <a:rPr lang="en-US" b="1" dirty="0">
+                <a:solidFill>
+                  <a:schemeClr val="bg1"/>
+                </a:solidFill>
+              </a:rPr>
+              <a:t> 16 --skip-bids-validation --fs-no-</a:t>
+            </a:r>
+            <a:r>
+              <a:rPr lang="en-US" b="1" dirty="0" err="1">
+                <a:solidFill>
+                  <a:schemeClr val="bg1"/>
+                </a:solidFill>
+              </a:rPr>
+              <a:t>reconall</a:t>
+            </a:r>
+            <a:r>
+              <a:rPr lang="en-US" b="1" dirty="0">
+                <a:solidFill>
+                  <a:schemeClr val="bg1"/>
+                </a:solidFill>
+              </a:rPr>
+              <a:t> --low-mem</a:t>
+            </a:r>
+            <a:endParaRPr lang="en-US" b="1" dirty="0">
               <a:solidFill>
                 <a:schemeClr val="accent5">
                   <a:lumMod val="40000"/>
                   <a:lumOff val="60000"/>
                 </a:schemeClr>
               </a:solidFill>
-            </a:endParaRPr>
-          </a:p>
-          <a:p>
-            <a:r>
-              <a:rPr lang="en-US" sz="1600" b="1" dirty="0">
-                <a:solidFill>
-                  <a:schemeClr val="bg1"/>
-                </a:solidFill>
-              </a:rPr>
-              <a:t>&gt;&gt;        /scratch/${</a:t>
-            </a:r>
-            <a:r>
-              <a:rPr lang="en-US" sz="1600" b="1" dirty="0">
-                <a:solidFill>
-                  <a:schemeClr val="accent4">
-                    <a:lumMod val="40000"/>
-                    <a:lumOff val="60000"/>
-                  </a:schemeClr>
-                </a:solidFill>
-              </a:rPr>
-              <a:t>NETID</a:t>
-            </a:r>
-            <a:r>
-              <a:rPr lang="en-US" sz="1600" b="1" dirty="0">
-                <a:solidFill>
-                  <a:schemeClr val="bg1"/>
-                </a:solidFill>
-              </a:rPr>
-              <a:t>}/</a:t>
-            </a:r>
-            <a:r>
-              <a:rPr lang="en-US" sz="1600" b="1" dirty="0" err="1">
-                <a:solidFill>
-                  <a:schemeClr val="bg1"/>
-                </a:solidFill>
-              </a:rPr>
-              <a:t>brainhack</a:t>
-            </a:r>
-            <a:r>
-              <a:rPr lang="en-US" sz="1600" b="1" dirty="0">
-                <a:solidFill>
-                  <a:schemeClr val="bg1"/>
-                </a:solidFill>
-              </a:rPr>
-              <a:t>/</a:t>
-            </a:r>
-            <a:r>
-              <a:rPr lang="en-US" sz="1600" b="1" dirty="0" err="1">
-                <a:solidFill>
-                  <a:schemeClr val="bg1"/>
-                </a:solidFill>
-              </a:rPr>
-              <a:t>rcgBIDS</a:t>
-            </a:r>
-            <a:r>
-              <a:rPr lang="en-US" sz="1600" b="1" dirty="0">
-                <a:solidFill>
-                  <a:schemeClr val="bg1"/>
-                </a:solidFill>
-              </a:rPr>
-              <a:t>/derivatives \ </a:t>
-            </a:r>
-            <a:r>
-              <a:rPr lang="en-US" sz="1600" b="1" dirty="0">
-                <a:solidFill>
-                  <a:schemeClr val="accent5">
-                    <a:lumMod val="40000"/>
-                    <a:lumOff val="60000"/>
-                  </a:schemeClr>
-                </a:solidFill>
-                <a:sym typeface="Wingdings" panose="05000000000000000000" pitchFamily="2" charset="2"/>
-              </a:rPr>
-              <a:t># Derivatives </a:t>
-            </a:r>
-            <a:r>
-              <a:rPr lang="en-US" sz="1600" b="1" dirty="0" err="1">
-                <a:solidFill>
-                  <a:schemeClr val="accent5">
-                    <a:lumMod val="40000"/>
-                    <a:lumOff val="60000"/>
-                  </a:schemeClr>
-                </a:solidFill>
-                <a:sym typeface="Wingdings" panose="05000000000000000000" pitchFamily="2" charset="2"/>
-              </a:rPr>
-              <a:t>dir</a:t>
-            </a:r>
-            <a:endParaRPr lang="en-US" sz="1600" b="1" dirty="0">
-              <a:solidFill>
-                <a:schemeClr val="accent5">
-                  <a:lumMod val="40000"/>
-                  <a:lumOff val="60000"/>
-                </a:schemeClr>
-              </a:solidFill>
-            </a:endParaRPr>
-          </a:p>
-          <a:p>
-            <a:r>
-              <a:rPr lang="en-US" sz="1600" b="1" dirty="0">
-                <a:solidFill>
-                  <a:schemeClr val="bg1"/>
-                </a:solidFill>
-              </a:rPr>
-              <a:t>&gt;&gt;        participant --participant-label ${</a:t>
-            </a:r>
-            <a:r>
-              <a:rPr lang="en-US" sz="1600" b="1" dirty="0">
-                <a:solidFill>
-                  <a:srgbClr val="FFC000"/>
-                </a:solidFill>
-              </a:rPr>
-              <a:t>SUBID</a:t>
-            </a:r>
-            <a:r>
-              <a:rPr lang="en-US" sz="1600" b="1" dirty="0">
-                <a:solidFill>
-                  <a:schemeClr val="bg1"/>
-                </a:solidFill>
-              </a:rPr>
-              <a:t>} \ </a:t>
-            </a:r>
-            <a:r>
-              <a:rPr lang="en-US" sz="1600" b="1" dirty="0">
-                <a:solidFill>
-                  <a:schemeClr val="accent5">
-                    <a:lumMod val="40000"/>
-                    <a:lumOff val="60000"/>
-                  </a:schemeClr>
-                </a:solidFill>
-                <a:sym typeface="Wingdings" panose="05000000000000000000" pitchFamily="2" charset="2"/>
-              </a:rPr>
-              <a:t># Subject label</a:t>
-            </a:r>
-            <a:endParaRPr lang="en-US" sz="1600" b="1" dirty="0">
-              <a:solidFill>
-                <a:schemeClr val="accent5">
-                  <a:lumMod val="40000"/>
-                  <a:lumOff val="60000"/>
-                </a:schemeClr>
-              </a:solidFill>
-            </a:endParaRPr>
-          </a:p>
-          <a:p>
-            <a:r>
-              <a:rPr lang="en-US" sz="1600" b="1" dirty="0">
-                <a:solidFill>
-                  <a:schemeClr val="bg1"/>
-                </a:solidFill>
-              </a:rPr>
-              <a:t>&gt;&gt;        --fs-license-file /scratch/${</a:t>
-            </a:r>
-            <a:r>
-              <a:rPr lang="en-US" sz="1600" b="1" dirty="0">
-                <a:solidFill>
-                  <a:schemeClr val="accent4">
-                    <a:lumMod val="40000"/>
-                    <a:lumOff val="60000"/>
-                  </a:schemeClr>
-                </a:solidFill>
-              </a:rPr>
-              <a:t>NETID</a:t>
-            </a:r>
-            <a:r>
-              <a:rPr lang="en-US" sz="1600" b="1" dirty="0">
-                <a:solidFill>
-                  <a:schemeClr val="bg1"/>
-                </a:solidFill>
-              </a:rPr>
-              <a:t>}/</a:t>
-            </a:r>
-            <a:r>
-              <a:rPr lang="en-US" sz="1600" b="1" dirty="0" err="1">
-                <a:solidFill>
-                  <a:schemeClr val="bg1"/>
-                </a:solidFill>
-              </a:rPr>
-              <a:t>brainhack</a:t>
-            </a:r>
-            <a:r>
-              <a:rPr lang="en-US" sz="1600" b="1" dirty="0">
-                <a:solidFill>
-                  <a:schemeClr val="bg1"/>
-                </a:solidFill>
-              </a:rPr>
-              <a:t>/</a:t>
-            </a:r>
-            <a:r>
-              <a:rPr lang="en-US" sz="1600" b="1" dirty="0" err="1">
-                <a:solidFill>
-                  <a:schemeClr val="bg1"/>
-                </a:solidFill>
-              </a:rPr>
-              <a:t>rcgBIDS</a:t>
-            </a:r>
-            <a:r>
-              <a:rPr lang="en-US" sz="1600" b="1" dirty="0">
-                <a:solidFill>
-                  <a:schemeClr val="bg1"/>
-                </a:solidFill>
-              </a:rPr>
-              <a:t>/code/license.txt \ </a:t>
-            </a:r>
-            <a:r>
-              <a:rPr lang="en-US" sz="1600" b="1" dirty="0">
-                <a:solidFill>
-                  <a:schemeClr val="accent5">
-                    <a:lumMod val="40000"/>
-                    <a:lumOff val="60000"/>
-                  </a:schemeClr>
-                </a:solidFill>
-                <a:sym typeface="Wingdings" panose="05000000000000000000" pitchFamily="2" charset="2"/>
-              </a:rPr>
-              <a:t>#</a:t>
-            </a:r>
-            <a:r>
-              <a:rPr lang="en-US" sz="1600" b="1" dirty="0">
-                <a:solidFill>
-                  <a:schemeClr val="bg1"/>
-                </a:solidFill>
-                <a:sym typeface="Wingdings" panose="05000000000000000000" pitchFamily="2" charset="2"/>
-              </a:rPr>
-              <a:t> </a:t>
-            </a:r>
-            <a:r>
-              <a:rPr lang="en-US" sz="1600" b="1" dirty="0" err="1">
-                <a:solidFill>
-                  <a:schemeClr val="accent5">
-                    <a:lumMod val="40000"/>
-                    <a:lumOff val="60000"/>
-                  </a:schemeClr>
-                </a:solidFill>
-                <a:sym typeface="Wingdings" panose="05000000000000000000" pitchFamily="2" charset="2"/>
-              </a:rPr>
-              <a:t>FreeSurfer</a:t>
-            </a:r>
-            <a:r>
-              <a:rPr lang="en-US" sz="1600" b="1" dirty="0">
-                <a:solidFill>
-                  <a:schemeClr val="accent5">
-                    <a:lumMod val="40000"/>
-                    <a:lumOff val="60000"/>
-                  </a:schemeClr>
-                </a:solidFill>
-                <a:sym typeface="Wingdings" panose="05000000000000000000" pitchFamily="2" charset="2"/>
-              </a:rPr>
-              <a:t> license</a:t>
-            </a:r>
-            <a:endParaRPr lang="en-US" sz="1600" b="1" dirty="0">
-              <a:solidFill>
-                <a:schemeClr val="accent5">
-                  <a:lumMod val="40000"/>
-                  <a:lumOff val="60000"/>
-                </a:schemeClr>
-              </a:solidFill>
-            </a:endParaRPr>
-          </a:p>
-          <a:p>
-            <a:r>
-              <a:rPr lang="en-US" sz="1600" b="1" dirty="0">
-                <a:solidFill>
-                  <a:schemeClr val="bg1"/>
-                </a:solidFill>
-              </a:rPr>
-              <a:t>&gt;&gt;        --output-spaces MNI152NLin2009cAsym:res-native:res-2 T1w </a:t>
-            </a:r>
-            <a:r>
-              <a:rPr lang="en-US" sz="1600" b="1" dirty="0" err="1">
-                <a:solidFill>
-                  <a:schemeClr val="bg1"/>
-                </a:solidFill>
-              </a:rPr>
-              <a:t>func</a:t>
-            </a:r>
-            <a:r>
-              <a:rPr lang="en-US" sz="1600" b="1" dirty="0">
-                <a:solidFill>
-                  <a:schemeClr val="bg1"/>
-                </a:solidFill>
-              </a:rPr>
-              <a:t> \ </a:t>
-            </a:r>
-            <a:r>
-              <a:rPr lang="en-US" sz="1600" b="1" dirty="0">
-                <a:solidFill>
-                  <a:schemeClr val="accent5">
-                    <a:lumMod val="40000"/>
-                    <a:lumOff val="60000"/>
-                  </a:schemeClr>
-                </a:solidFill>
-                <a:sym typeface="Wingdings" panose="05000000000000000000" pitchFamily="2" charset="2"/>
-              </a:rPr>
-              <a:t># Output spaces</a:t>
-            </a:r>
-            <a:endParaRPr lang="en-US" sz="1600" b="1" dirty="0">
-              <a:solidFill>
-                <a:schemeClr val="accent5">
-                  <a:lumMod val="40000"/>
-                  <a:lumOff val="60000"/>
-                </a:schemeClr>
-              </a:solidFill>
-            </a:endParaRPr>
-          </a:p>
-          <a:p>
-            <a:r>
-              <a:rPr lang="en-US" sz="1600" b="1" dirty="0">
-                <a:solidFill>
-                  <a:schemeClr val="bg1"/>
-                </a:solidFill>
-              </a:rPr>
-              <a:t>&gt;&gt;        -w /scratch/${</a:t>
-            </a:r>
-            <a:r>
-              <a:rPr lang="en-US" sz="1600" b="1" dirty="0">
-                <a:solidFill>
-                  <a:schemeClr val="accent4">
-                    <a:lumMod val="40000"/>
-                    <a:lumOff val="60000"/>
-                  </a:schemeClr>
-                </a:solidFill>
-              </a:rPr>
-              <a:t>NETID</a:t>
-            </a:r>
-            <a:r>
-              <a:rPr lang="en-US" sz="1600" b="1" dirty="0">
-                <a:solidFill>
-                  <a:schemeClr val="bg1"/>
-                </a:solidFill>
-              </a:rPr>
-              <a:t>}/VCAP/</a:t>
-            </a:r>
-            <a:r>
-              <a:rPr lang="en-US" sz="1600" b="1" dirty="0" err="1">
-                <a:solidFill>
-                  <a:schemeClr val="bg1"/>
-                </a:solidFill>
-              </a:rPr>
-              <a:t>fmriprep_work</a:t>
-            </a:r>
-            <a:r>
-              <a:rPr lang="en-US" sz="1600" b="1" dirty="0">
-                <a:solidFill>
-                  <a:schemeClr val="bg1"/>
-                </a:solidFill>
-              </a:rPr>
-              <a:t>/${</a:t>
-            </a:r>
-            <a:r>
-              <a:rPr lang="en-US" sz="1600" b="1" dirty="0">
-                <a:solidFill>
-                  <a:srgbClr val="FFC000"/>
-                </a:solidFill>
-              </a:rPr>
-              <a:t>SUBID</a:t>
-            </a:r>
-            <a:r>
-              <a:rPr lang="en-US" sz="1600" b="1" dirty="0">
-                <a:solidFill>
-                  <a:schemeClr val="bg1"/>
-                </a:solidFill>
-              </a:rPr>
-              <a:t>} \ </a:t>
-            </a:r>
-            <a:r>
-              <a:rPr lang="en-US" sz="1600" b="1" dirty="0">
-                <a:solidFill>
-                  <a:schemeClr val="accent5">
-                    <a:lumMod val="40000"/>
-                    <a:lumOff val="60000"/>
-                  </a:schemeClr>
-                </a:solidFill>
-                <a:sym typeface="Wingdings" panose="05000000000000000000" pitchFamily="2" charset="2"/>
-              </a:rPr>
-              <a:t># Working directory</a:t>
-            </a:r>
-            <a:endParaRPr lang="en-US" sz="1600" b="1" dirty="0">
-              <a:solidFill>
-                <a:schemeClr val="accent5">
-                  <a:lumMod val="40000"/>
-                  <a:lumOff val="60000"/>
-                </a:schemeClr>
-              </a:solidFill>
-            </a:endParaRPr>
-          </a:p>
-          <a:p>
-            <a:r>
-              <a:rPr lang="en-US" sz="1600" b="1" dirty="0">
-                <a:solidFill>
-                  <a:schemeClr val="bg1"/>
-                </a:solidFill>
-              </a:rPr>
-              <a:t>&gt;&gt;        --</a:t>
-            </a:r>
-            <a:r>
-              <a:rPr lang="en-US" sz="1600" b="1" dirty="0" err="1">
-                <a:solidFill>
-                  <a:schemeClr val="bg1"/>
-                </a:solidFill>
-              </a:rPr>
-              <a:t>omp-nthreads</a:t>
-            </a:r>
-            <a:r>
-              <a:rPr lang="en-US" sz="1600" b="1" dirty="0">
-                <a:solidFill>
-                  <a:schemeClr val="bg1"/>
-                </a:solidFill>
-              </a:rPr>
-              <a:t> 16 \ </a:t>
-            </a:r>
-            <a:r>
-              <a:rPr lang="en-US" sz="1600" b="1" dirty="0">
-                <a:solidFill>
-                  <a:schemeClr val="accent5">
-                    <a:lumMod val="40000"/>
-                    <a:lumOff val="60000"/>
-                  </a:schemeClr>
-                </a:solidFill>
-                <a:sym typeface="Wingdings" panose="05000000000000000000" pitchFamily="2" charset="2"/>
-              </a:rPr>
-              <a:t># Multithreading param</a:t>
-            </a:r>
-            <a:endParaRPr lang="en-US" sz="1600" b="1" dirty="0">
-              <a:solidFill>
-                <a:schemeClr val="accent5">
-                  <a:lumMod val="40000"/>
-                  <a:lumOff val="60000"/>
-                </a:schemeClr>
-              </a:solidFill>
-            </a:endParaRPr>
-          </a:p>
-          <a:p>
-            <a:r>
-              <a:rPr lang="en-US" sz="1600" b="1" dirty="0">
-                <a:solidFill>
-                  <a:schemeClr val="bg1"/>
-                </a:solidFill>
-              </a:rPr>
-              <a:t>&gt;&gt;        --skip-bids-validation \ </a:t>
-            </a:r>
-            <a:r>
-              <a:rPr lang="en-US" sz="1600" b="1" dirty="0">
-                <a:solidFill>
-                  <a:schemeClr val="accent5">
-                    <a:lumMod val="40000"/>
-                    <a:lumOff val="60000"/>
-                  </a:schemeClr>
-                </a:solidFill>
-                <a:sym typeface="Wingdings" panose="05000000000000000000" pitchFamily="2" charset="2"/>
-              </a:rPr>
-              <a:t># BIDS validation</a:t>
-            </a:r>
-            <a:endParaRPr lang="en-US" sz="1600" b="1" dirty="0">
-              <a:solidFill>
-                <a:schemeClr val="accent5">
-                  <a:lumMod val="40000"/>
-                  <a:lumOff val="60000"/>
-                </a:schemeClr>
-              </a:solidFill>
-            </a:endParaRPr>
-          </a:p>
-          <a:p>
-            <a:r>
-              <a:rPr lang="en-US" sz="1600" b="1" dirty="0">
-                <a:solidFill>
-                  <a:schemeClr val="bg1"/>
-                </a:solidFill>
-              </a:rPr>
-              <a:t>&gt;&gt;        --fs-no-</a:t>
-            </a:r>
-            <a:r>
-              <a:rPr lang="en-US" sz="1600" b="1" dirty="0" err="1">
-                <a:solidFill>
-                  <a:schemeClr val="bg1"/>
-                </a:solidFill>
-              </a:rPr>
-              <a:t>reconall</a:t>
-            </a:r>
-            <a:r>
-              <a:rPr lang="en-US" sz="1600" b="1" dirty="0">
-                <a:solidFill>
-                  <a:schemeClr val="bg1"/>
-                </a:solidFill>
-              </a:rPr>
-              <a:t> \ </a:t>
-            </a:r>
-            <a:r>
-              <a:rPr lang="en-US" sz="1600" b="1" dirty="0">
-                <a:solidFill>
-                  <a:schemeClr val="accent5">
-                    <a:lumMod val="40000"/>
-                    <a:lumOff val="60000"/>
-                  </a:schemeClr>
-                </a:solidFill>
-                <a:sym typeface="Wingdings" panose="05000000000000000000" pitchFamily="2" charset="2"/>
-              </a:rPr>
-              <a:t># </a:t>
-            </a:r>
-            <a:r>
-              <a:rPr lang="en-US" sz="1600" b="1" dirty="0" err="1">
-                <a:solidFill>
-                  <a:schemeClr val="accent5">
-                    <a:lumMod val="40000"/>
-                    <a:lumOff val="60000"/>
-                  </a:schemeClr>
-                </a:solidFill>
-                <a:sym typeface="Wingdings" panose="05000000000000000000" pitchFamily="2" charset="2"/>
-              </a:rPr>
-              <a:t>FreeSurfer</a:t>
-            </a:r>
-            <a:r>
-              <a:rPr lang="en-US" sz="1600" b="1" dirty="0">
-                <a:solidFill>
-                  <a:schemeClr val="accent5">
-                    <a:lumMod val="40000"/>
-                    <a:lumOff val="60000"/>
-                  </a:schemeClr>
-                </a:solidFill>
-                <a:sym typeface="Wingdings" panose="05000000000000000000" pitchFamily="2" charset="2"/>
-              </a:rPr>
-              <a:t> surface reconstruction (takes a long time)</a:t>
-            </a:r>
-            <a:endParaRPr lang="en-US" sz="1600" b="1" dirty="0">
-              <a:solidFill>
-                <a:schemeClr val="accent5">
-                  <a:lumMod val="40000"/>
-                  <a:lumOff val="60000"/>
-                </a:schemeClr>
-              </a:solidFill>
-            </a:endParaRPr>
-          </a:p>
-          <a:p>
-            <a:r>
-              <a:rPr lang="en-US" sz="1600" b="1" dirty="0">
-                <a:solidFill>
-                  <a:schemeClr val="bg1"/>
-                </a:solidFill>
-              </a:rPr>
-              <a:t>&gt;&gt;        --low-mem </a:t>
-            </a:r>
-            <a:r>
-              <a:rPr lang="en-US" sz="1600" b="1" dirty="0">
-                <a:solidFill>
-                  <a:schemeClr val="accent5">
-                    <a:lumMod val="40000"/>
-                    <a:lumOff val="60000"/>
-                  </a:schemeClr>
-                </a:solidFill>
-                <a:sym typeface="Wingdings" panose="05000000000000000000" pitchFamily="2" charset="2"/>
-              </a:rPr>
-              <a:t># Helps to avoid RAM issues</a:t>
-            </a:r>
-          </a:p>
-          <a:p>
-            <a:r>
-              <a:rPr lang="en-US" sz="1600" b="1" dirty="0">
-                <a:solidFill>
-                  <a:schemeClr val="bg1"/>
-                </a:solidFill>
-                <a:sym typeface="Wingdings" panose="05000000000000000000" pitchFamily="2" charset="2"/>
-              </a:rPr>
-              <a:t>&gt;&gt;</a:t>
-            </a:r>
-            <a:endParaRPr lang="en-US" sz="1600" b="1" dirty="0">
-              <a:solidFill>
-                <a:schemeClr val="bg1"/>
-              </a:solidFill>
+              <a:sym typeface="Wingdings" panose="05000000000000000000" pitchFamily="2" charset="2"/>
             </a:endParaRPr>
           </a:p>
         </p:txBody>
